--- a/Jiyoon/디자인 예시 ppt 2.pptx
+++ b/Jiyoon/디자인 예시 ppt 2.pptx
@@ -725,7 +725,7 @@
               <a:buNone/>
             </a:pPr>
             <a:r>
-              <a:rPr lang="en-US" sz="3600" b="1" kern="0" spc="-40" dirty="0">
+              <a:rPr lang="en-US" sz="3600" kern="0" spc="-40" dirty="0">
                 <a:ln w="15875">
                   <a:solidFill>
                     <a:srgbClr val="222222"/>
@@ -734,15 +734,15 @@
                 <a:solidFill>
                   <a:srgbClr val="222222"/>
                 </a:solidFill>
-                <a:latin typeface="에이투지체 7 Bold" pitchFamily="50" charset="-127"/>
-                <a:ea typeface="에이투지체 7 Bold" pitchFamily="50" charset="-127"/>
+                <a:latin typeface="에이투지체 6 SemiBold" pitchFamily="50" charset="-127"/>
+                <a:ea typeface="에이투지체 6 SemiBold" pitchFamily="50" charset="-127"/>
                 <a:cs typeface="Pretendard Black" pitchFamily="34" charset="-120"/>
               </a:rPr>
               <a:t>1. 데이터 수집 개요</a:t>
             </a:r>
-            <a:endParaRPr lang="en-US" sz="3600" b="1" dirty="0">
-              <a:latin typeface="에이투지체 7 Bold" pitchFamily="50" charset="-127"/>
-              <a:ea typeface="에이투지체 7 Bold" pitchFamily="50" charset="-127"/>
+            <a:endParaRPr lang="en-US" sz="3600" dirty="0">
+              <a:latin typeface="에이투지체 6 SemiBold" pitchFamily="50" charset="-127"/>
+              <a:ea typeface="에이투지체 6 SemiBold" pitchFamily="50" charset="-127"/>
             </a:endParaRPr>
           </a:p>
         </p:txBody>
